--- a/docs/2026-2/cea055-estatistica-probabilidade/12-modelos-continuos-i/arquivos/Aula_12_Modelos_Continuos_I_SITE.pptx
+++ b/docs/2026-2/cea055-estatistica-probabilidade/12-modelos-continuos-i/arquivos/Aula_12_Modelos_Continuos_I_SITE.pptx
@@ -5,7 +5,7 @@
     <p:sldMasterId id="2147483648" r:id="rId1"/>
   </p:sldMasterIdLst>
   <p:notesMasterIdLst>
-    <p:notesMasterId r:id="rId21"/>
+    <p:notesMasterId r:id="rId19"/>
   </p:notesMasterIdLst>
   <p:sldIdLst>
     <p:sldId id="900" r:id="rId2"/>
@@ -17,14 +17,14 @@
     <p:sldId id="902" r:id="rId8"/>
     <p:sldId id="314" r:id="rId9"/>
     <p:sldId id="904" r:id="rId10"/>
-    <p:sldId id="282" r:id="rId12"/>
-    <p:sldId id="284" r:id="rId13"/>
-    <p:sldId id="283" r:id="rId14"/>
-    <p:sldId id="291" r:id="rId15"/>
-    <p:sldId id="906" r:id="rId16"/>
-    <p:sldId id="907" r:id="rId17"/>
-    <p:sldId id="901" r:id="rId19"/>
-    <p:sldId id="903" r:id="rId20"/>
+    <p:sldId id="282" r:id="rId11"/>
+    <p:sldId id="284" r:id="rId12"/>
+    <p:sldId id="283" r:id="rId13"/>
+    <p:sldId id="291" r:id="rId14"/>
+    <p:sldId id="906" r:id="rId15"/>
+    <p:sldId id="907" r:id="rId16"/>
+    <p:sldId id="901" r:id="rId17"/>
+    <p:sldId id="903" r:id="rId18"/>
   </p:sldIdLst>
   <p:sldSz cx="12192000" cy="6858000"/>
   <p:notesSz cx="6858000" cy="9144000"/>
@@ -239,7 +239,7 @@
           <a:p>
             <a:fld id="{44623A65-BD25-40B6-8815-498297225DF7}" type="datetimeFigureOut">
               <a:rPr lang="pt-BR" smtClean="0"/>
-              <a:t>07/10/2026</a:t>
+              <a:t>22/10/2026</a:t>
             </a:fld>
             <a:endParaRPr lang="pt-BR" dirty="0"/>
           </a:p>
@@ -653,7 +653,7 @@
           <a:p>
             <a:fld id="{5B45E566-B383-4B2D-B951-1136FD38326E}" type="datetimeFigureOut">
               <a:rPr lang="pt-BR" smtClean="0"/>
-              <a:t>07/10/2026</a:t>
+              <a:t>22/10/2026</a:t>
             </a:fld>
             <a:endParaRPr lang="pt-BR" dirty="0"/>
           </a:p>
@@ -851,7 +851,7 @@
           <a:p>
             <a:fld id="{5B45E566-B383-4B2D-B951-1136FD38326E}" type="datetimeFigureOut">
               <a:rPr lang="pt-BR" smtClean="0"/>
-              <a:t>07/10/2026</a:t>
+              <a:t>22/10/2026</a:t>
             </a:fld>
             <a:endParaRPr lang="pt-BR" dirty="0"/>
           </a:p>
@@ -1059,7 +1059,7 @@
           <a:p>
             <a:fld id="{5B45E566-B383-4B2D-B951-1136FD38326E}" type="datetimeFigureOut">
               <a:rPr lang="pt-BR" smtClean="0"/>
-              <a:t>07/10/2026</a:t>
+              <a:t>22/10/2026</a:t>
             </a:fld>
             <a:endParaRPr lang="pt-BR" dirty="0"/>
           </a:p>
@@ -1257,7 +1257,7 @@
           <a:p>
             <a:fld id="{5B45E566-B383-4B2D-B951-1136FD38326E}" type="datetimeFigureOut">
               <a:rPr lang="pt-BR" smtClean="0"/>
-              <a:t>07/10/2026</a:t>
+              <a:t>22/10/2026</a:t>
             </a:fld>
             <a:endParaRPr lang="pt-BR" dirty="0"/>
           </a:p>
@@ -1532,7 +1532,7 @@
           <a:p>
             <a:fld id="{5B45E566-B383-4B2D-B951-1136FD38326E}" type="datetimeFigureOut">
               <a:rPr lang="pt-BR" smtClean="0"/>
-              <a:t>07/10/2026</a:t>
+              <a:t>22/10/2026</a:t>
             </a:fld>
             <a:endParaRPr lang="pt-BR" dirty="0"/>
           </a:p>
@@ -1797,7 +1797,7 @@
           <a:p>
             <a:fld id="{5B45E566-B383-4B2D-B951-1136FD38326E}" type="datetimeFigureOut">
               <a:rPr lang="pt-BR" smtClean="0"/>
-              <a:t>07/10/2026</a:t>
+              <a:t>22/10/2026</a:t>
             </a:fld>
             <a:endParaRPr lang="pt-BR" dirty="0"/>
           </a:p>
@@ -2209,7 +2209,7 @@
           <a:p>
             <a:fld id="{5B45E566-B383-4B2D-B951-1136FD38326E}" type="datetimeFigureOut">
               <a:rPr lang="pt-BR" smtClean="0"/>
-              <a:t>07/10/2026</a:t>
+              <a:t>22/10/2026</a:t>
             </a:fld>
             <a:endParaRPr lang="pt-BR" dirty="0"/>
           </a:p>
@@ -2350,7 +2350,7 @@
           <a:p>
             <a:fld id="{5B45E566-B383-4B2D-B951-1136FD38326E}" type="datetimeFigureOut">
               <a:rPr lang="pt-BR" smtClean="0"/>
-              <a:t>07/10/2026</a:t>
+              <a:t>22/10/2026</a:t>
             </a:fld>
             <a:endParaRPr lang="pt-BR" dirty="0"/>
           </a:p>
@@ -2463,7 +2463,7 @@
           <a:p>
             <a:fld id="{5B45E566-B383-4B2D-B951-1136FD38326E}" type="datetimeFigureOut">
               <a:rPr lang="pt-BR" smtClean="0"/>
-              <a:t>07/10/2026</a:t>
+              <a:t>22/10/2026</a:t>
             </a:fld>
             <a:endParaRPr lang="pt-BR" dirty="0"/>
           </a:p>
@@ -2774,7 +2774,7 @@
           <a:p>
             <a:fld id="{5B45E566-B383-4B2D-B951-1136FD38326E}" type="datetimeFigureOut">
               <a:rPr lang="pt-BR" smtClean="0"/>
-              <a:t>07/10/2026</a:t>
+              <a:t>22/10/2026</a:t>
             </a:fld>
             <a:endParaRPr lang="pt-BR" dirty="0"/>
           </a:p>
@@ -3062,7 +3062,7 @@
           <a:p>
             <a:fld id="{5B45E566-B383-4B2D-B951-1136FD38326E}" type="datetimeFigureOut">
               <a:rPr lang="pt-BR" smtClean="0"/>
-              <a:t>07/10/2026</a:t>
+              <a:t>22/10/2026</a:t>
             </a:fld>
             <a:endParaRPr lang="pt-BR" dirty="0"/>
           </a:p>
@@ -3327,7 +3327,7 @@
           <a:p>
             <a:fld id="{5B45E566-B383-4B2D-B951-1136FD38326E}" type="datetimeFigureOut">
               <a:rPr lang="pt-BR" smtClean="0"/>
-              <a:t>07/10/2026</a:t>
+              <a:t>22/10/2026</a:t>
             </a:fld>
             <a:endParaRPr lang="pt-BR" dirty="0"/>
           </a:p>
@@ -3900,15 +3900,23 @@
             </a:pPr>
             <a:r>
               <a:rPr lang="pt-BR" sz="2000" dirty="0"/>
-              <a:t>Montgomery, Runger. </a:t>
-            </a:r>
-            <a:r>
-              <a:rPr lang="pt-BR" sz="2000" b="1" dirty="0"/>
-              <a:t>Applied Statistics and Probability for Engineers</a:t>
+              <a:t>Montgomery, Runger</a:t>
+            </a:r>
+            <a:r>
+              <a:rPr lang="pt-BR" sz="2000"/>
+              <a:t>. </a:t>
+            </a:r>
+            <a:r>
+              <a:rPr lang="pt-BR" sz="2000" b="1"/>
+              <a:t>Estatística Aplicada e Probabilidade para Engenheiros</a:t>
+            </a:r>
+            <a:r>
+              <a:rPr lang="pt-BR" sz="2000"/>
+              <a:t>, 7ª ed. — </a:t>
             </a:r>
             <a:r>
               <a:rPr lang="pt-BR" sz="2000" dirty="0"/>
-              <a:t>, 7th ed — Cap. 4 (4.4, 4.7)</a:t>
+              <a:t>Cap. 4 (4.4, 4.7)</a:t>
             </a:r>
           </a:p>
           <a:p>
@@ -4039,7 +4047,7 @@
 </p:sld>
 </file>
 
-<file path=ppt/slides/slide11.xml><?xml version="1.0" encoding="utf-8"?>
+<file path=ppt/slides/slide10.xml><?xml version="1.0" encoding="utf-8"?>
 <p:sld xmlns:a="http://schemas.openxmlformats.org/drawingml/2006/main" xmlns:r="http://schemas.openxmlformats.org/officeDocument/2006/relationships" xmlns:p="http://schemas.openxmlformats.org/presentationml/2006/main">
   <p:cSld>
     <p:spTree>
@@ -4536,7 +4544,7 @@
 </p:sld>
 </file>
 
-<file path=ppt/slides/slide12.xml><?xml version="1.0" encoding="utf-8"?>
+<file path=ppt/slides/slide11.xml><?xml version="1.0" encoding="utf-8"?>
 <p:sld xmlns:a="http://schemas.openxmlformats.org/drawingml/2006/main" xmlns:r="http://schemas.openxmlformats.org/officeDocument/2006/relationships" xmlns:p="http://schemas.openxmlformats.org/presentationml/2006/main">
   <p:cSld>
     <p:spTree>
@@ -5035,7 +5043,7 @@
 </p:sld>
 </file>
 
-<file path=ppt/slides/slide13.xml><?xml version="1.0" encoding="utf-8"?>
+<file path=ppt/slides/slide12.xml><?xml version="1.0" encoding="utf-8"?>
 <p:sld xmlns:a="http://schemas.openxmlformats.org/drawingml/2006/main" xmlns:r="http://schemas.openxmlformats.org/officeDocument/2006/relationships" xmlns:p="http://schemas.openxmlformats.org/presentationml/2006/main">
   <p:cSld>
     <p:spTree>
@@ -5304,7 +5312,7 @@
 </p:sld>
 </file>
 
-<file path=ppt/slides/slide14.xml><?xml version="1.0" encoding="utf-8"?>
+<file path=ppt/slides/slide13.xml><?xml version="1.0" encoding="utf-8"?>
 <p:sld xmlns:a="http://schemas.openxmlformats.org/drawingml/2006/main" xmlns:r="http://schemas.openxmlformats.org/officeDocument/2006/relationships" xmlns:p="http://schemas.openxmlformats.org/presentationml/2006/main">
   <p:cSld>
     <p:spTree>
@@ -5513,7 +5521,7 @@
 </p:sld>
 </file>
 
-<file path=ppt/slides/slide15.xml><?xml version="1.0" encoding="utf-8"?>
+<file path=ppt/slides/slide14.xml><?xml version="1.0" encoding="utf-8"?>
 <p:sld xmlns:a="http://schemas.openxmlformats.org/drawingml/2006/main" xmlns:r="http://schemas.openxmlformats.org/officeDocument/2006/relationships" xmlns:p="http://schemas.openxmlformats.org/presentationml/2006/main">
   <p:cSld>
     <p:spTree>
@@ -6553,7 +6561,7 @@
 </p:sld>
 </file>
 
-<file path=ppt/slides/slide16.xml><?xml version="1.0" encoding="utf-8"?>
+<file path=ppt/slides/slide15.xml><?xml version="1.0" encoding="utf-8"?>
 <p:sld xmlns:a="http://schemas.openxmlformats.org/drawingml/2006/main" xmlns:r="http://schemas.openxmlformats.org/officeDocument/2006/relationships" xmlns:p="http://schemas.openxmlformats.org/presentationml/2006/main">
   <p:cSld>
     <p:spTree>
@@ -7165,7 +7173,7 @@
 </p:sld>
 </file>
 
-<file path=ppt/slides/slide18.xml><?xml version="1.0" encoding="utf-8"?>
+<file path=ppt/slides/slide16.xml><?xml version="1.0" encoding="utf-8"?>
 <p:sld xmlns:a="http://schemas.openxmlformats.org/drawingml/2006/main" xmlns:r="http://schemas.openxmlformats.org/officeDocument/2006/relationships" xmlns:p="http://schemas.openxmlformats.org/presentationml/2006/main">
   <p:cSld>
     <p:spTree>
@@ -7333,7 +7341,7 @@
 </p:sld>
 </file>
 
-<file path=ppt/slides/slide19.xml><?xml version="1.0" encoding="utf-8"?>
+<file path=ppt/slides/slide17.xml><?xml version="1.0" encoding="utf-8"?>
 <p:sld xmlns:a="http://schemas.openxmlformats.org/drawingml/2006/main" xmlns:r="http://schemas.openxmlformats.org/officeDocument/2006/relationships" xmlns:p="http://schemas.openxmlformats.org/presentationml/2006/main">
   <p:cSld>
     <p:spTree>
@@ -10458,8 +10466,8 @@
           <a:chExt cx="0" cy="0"/>
         </a:xfrm>
       </p:grpSpPr>
-      <mc:AlternateContent xmlns:mc="http://schemas.openxmlformats.org/markup-compatibility/2006">
-        <mc:Choice xmlns:a14="http://schemas.microsoft.com/office/drawing/2010/main" Requires="a14">
+      <mc:AlternateContent xmlns:mc="http://schemas.openxmlformats.org/markup-compatibility/2006" xmlns:a14="http://schemas.microsoft.com/office/drawing/2010/main">
+        <mc:Choice Requires="a14">
           <p:sp>
             <p:nvSpPr>
               <p:cNvPr id="6" name="CaixaDeTexto 5">
@@ -10904,7 +10912,9 @@
                 <a14:m>
                   <m:oMath xmlns:m="http://schemas.openxmlformats.org/officeDocument/2006/math">
                     <m:r>
-                      <a:rPr lang="pt-BR" sz="2400" dirty="0"/>
+                      <a:rPr lang="pt-BR" sz="2400" dirty="0">
+                        <a:latin typeface="Cambria Math" panose="02040503050406030204" pitchFamily="18" charset="0"/>
+                      </a:rPr>
                       <m:t>.</m:t>
                     </m:r>
                   </m:oMath>
@@ -10914,7 +10924,7 @@
             </p:txBody>
           </p:sp>
         </mc:Choice>
-        <mc:Fallback>
+        <mc:Fallback xmlns="">
           <p:sp>
             <p:nvSpPr>
               <p:cNvPr id="6" name="CaixaDeTexto 5">
